--- a/materials/HW_TCA_lecture_EN.pptx
+++ b/materials/HW_TCA_lecture_EN.pptx
@@ -1248,7 +1248,7 @@
             <a:r>
               <a:rPr lang="en-US" dirty="0"/>
               <a:t>Now the practical part. Each of you gets a variant, from H1 to H6, with 12 failure modes of the module.
-For each mode: choose the effect class, and the severity follows from it. Choose the occurrence from the AIAG-VDA table; for a mature SMT technology it is usually low. For AOI, AXI and ICT, the app calculates the detection from the detection rules and shows you the reason. For the functional test, choose from the FT1–FT8 list the test that catches the defect, or NONE, give the D value and write why. Use the schematic in the app.
+For each mode: choose the effect class, and the severity follows from it. Choose the occurrence from the AIAG-VDA table; for a mature SMT technology it is usually low. For AOI, AXI and ICT, the app calculates the detection from the detection rules and shows you the reason. For the functional test, click the pin of the component, on the board or in the schematic: the app draws that pin's net and shows, in the Connections panel, whether it reaches a connector, meaning the functional test can see it, and whether it has a test point. Then choose from the FT1–FT8 list the test that catches the defect, or NONE, choose D from 1 to 10 on the AIAG-VDA detection scale, whose descriptions appear in the list, and write why.
 The combined detection is the minimum over the methods, and AP follows from the table. Then propose improvements: test points, AOI on the bottom side or new functional tests, and watch the risk go down. Where AP stays H or M, document the residual risk. At the end, send the report from the app.</a:t>
             </a:r>
             <a:endParaRPr lang="en-US" dirty="0"/>
@@ -9234,7 +9234,7 @@
                   <a:srgbClr val="5B6575"/>
                 </a:solidFill>
               </a:rPr>
-              <a:t>choose the effect class (E1–E9); S follows from it</a:t>
+              <a:t>choose the effect class (E1–E10); S follows from it</a:t>
             </a:r>
             <a:endParaRPr lang="en-US" sz="1300" dirty="0"/>
           </a:p>
@@ -9558,7 +9558,7 @@
                   <a:srgbClr val="5B6575"/>
                 </a:solidFill>
               </a:rPr>
-              <a:t>choose test FT1–FT8 or NONE, D and the justification</a:t>
+              <a:t>follow the pin's net, choose test FT1–FT8 or NONE, D from 1 to 10 and the justification</a:t>
             </a:r>
             <a:endParaRPr lang="en-US" sz="1300" dirty="0"/>
           </a:p>
